--- a/templates/CARRE/CARRE-Presentation-ppt/CARRE-Presentation-red2.pptx
+++ b/templates/CARRE/CARRE-Presentation-ppt/CARRE-Presentation-red2.pptx
@@ -217,7 +217,7 @@
           <a:p>
             <a:fld id="{3763DFAF-06DC-43B1-BBC9-0429973D07E9}" type="datetimeFigureOut">
               <a:rPr lang="en-US" smtClean="0"/>
-              <a:t>11/22/25</a:t>
+              <a:t>10/7/26</a:t>
             </a:fld>
             <a:endParaRPr lang="en-US"/>
           </a:p>
@@ -2026,7 +2026,7 @@
                 <a:latin typeface="Arial" panose="020B0604020202020204" pitchFamily="34" charset="0"/>
                 <a:cs typeface="Arial" panose="020B0604020202020204" pitchFamily="34" charset="0"/>
               </a:rPr>
-              <a:t>Center for Advancing the Radiation Resilience of Electrons (CARRE)</a:t>
+              <a:t>Center for Advancing the Radiation Resilience of Electronics (CARRE)</a:t>
             </a:r>
           </a:p>
           <a:p>
